--- a/microsoft_agent_framework_app/docs/Building_an_Agent_Framework_App.pptx
+++ b/microsoft_agent_framework_app/docs/Building_an_Agent_Framework_App.pptx
@@ -6106,7 +6106,18 @@
                 <a:ea typeface="Consolas" pitchFamily="34" charset="-122"/>
                 <a:cs typeface="Consolas" pitchFamily="34" charset="-120"/>
               </a:rPr>
-              <a:t>    foundry_project_endpoint: str = Field(</a:t>
+              <a:t>    model_provider: str = Field("foundry", alias="MODEL_PROVIDER</a:t>
+            </a:r>
+            <a:r>
+              <a:rPr lang="en-US" sz="1300" dirty="0">
+                <a:solidFill>
+                  <a:srgbClr val="E3B341"/>
+                </a:solidFill>
+                <a:latin typeface="Consolas" pitchFamily="34" charset="0"/>
+                <a:ea typeface="Consolas" pitchFamily="34" charset="-122"/>
+                <a:cs typeface="Consolas" pitchFamily="34" charset="-120"/>
+              </a:rPr>
+              <a:t>")</a:t>
             </a:r>
             <a:endParaRPr lang="en-US" sz="1300" dirty="0"/>
           </a:p>
@@ -6126,18 +6137,7 @@
                 <a:ea typeface="Consolas" pitchFamily="34" charset="-122"/>
                 <a:cs typeface="Consolas" pitchFamily="34" charset="-120"/>
               </a:rPr>
-              <a:t>        ..., alias="FOUNDRY_PROJECT_ENDPOINT</a:t>
-            </a:r>
-            <a:r>
-              <a:rPr lang="en-US" sz="1300" dirty="0">
-                <a:solidFill>
-                  <a:srgbClr val="E3B341"/>
-                </a:solidFill>
-                <a:latin typeface="Consolas" pitchFamily="34" charset="0"/>
-                <a:ea typeface="Consolas" pitchFamily="34" charset="-122"/>
-                <a:cs typeface="Consolas" pitchFamily="34" charset="-120"/>
-              </a:rPr>
-              <a:t>")</a:t>
+              <a:t>    foundry_project_endpoint: str = Field(</a:t>
             </a:r>
             <a:endParaRPr lang="en-US" sz="1300" dirty="0"/>
           </a:p>
@@ -6157,7 +6157,18 @@
                 <a:ea typeface="Consolas" pitchFamily="34" charset="-122"/>
                 <a:cs typeface="Consolas" pitchFamily="34" charset="-120"/>
               </a:rPr>
-              <a:t>    foundry_model_deployment_name: str = Field(</a:t>
+              <a:t>        ..., alias="FOUNDRY_PROJECT_ENDPOINT</a:t>
+            </a:r>
+            <a:r>
+              <a:rPr lang="en-US" sz="1300" dirty="0">
+                <a:solidFill>
+                  <a:srgbClr val="E3B341"/>
+                </a:solidFill>
+                <a:latin typeface="Consolas" pitchFamily="34" charset="0"/>
+                <a:ea typeface="Consolas" pitchFamily="34" charset="-122"/>
+                <a:cs typeface="Consolas" pitchFamily="34" charset="-120"/>
+              </a:rPr>
+              <a:t>")</a:t>
             </a:r>
             <a:endParaRPr lang="en-US" sz="1300" dirty="0"/>
           </a:p>
@@ -6177,18 +6188,7 @@
                 <a:ea typeface="Consolas" pitchFamily="34" charset="-122"/>
                 <a:cs typeface="Consolas" pitchFamily="34" charset="-120"/>
               </a:rPr>
-              <a:t>        ..., alias="FOUNDRY_MODEL_DEPLOYMENT_NAME</a:t>
-            </a:r>
-            <a:r>
-              <a:rPr lang="en-US" sz="1300" dirty="0">
-                <a:solidFill>
-                  <a:srgbClr val="E3B341"/>
-                </a:solidFill>
-                <a:latin typeface="Consolas" pitchFamily="34" charset="0"/>
-                <a:ea typeface="Consolas" pitchFamily="34" charset="-122"/>
-                <a:cs typeface="Consolas" pitchFamily="34" charset="-120"/>
-              </a:rPr>
-              <a:t>")</a:t>
+              <a:t>    foundry_model_deployment_name: str = Field(</a:t>
             </a:r>
             <a:endParaRPr lang="en-US" sz="1300" dirty="0"/>
           </a:p>
@@ -6208,7 +6208,18 @@
                 <a:ea typeface="Consolas" pitchFamily="34" charset="-122"/>
                 <a:cs typeface="Consolas" pitchFamily="34" charset="-120"/>
               </a:rPr>
-              <a:t> </a:t>
+              <a:t>        ..., alias="FOUNDRY_MODEL_DEPLOYMENT_NAME</a:t>
+            </a:r>
+            <a:r>
+              <a:rPr lang="en-US" sz="1300" dirty="0">
+                <a:solidFill>
+                  <a:srgbClr val="E3B341"/>
+                </a:solidFill>
+                <a:latin typeface="Consolas" pitchFamily="34" charset="0"/>
+                <a:ea typeface="Consolas" pitchFamily="34" charset="-122"/>
+                <a:cs typeface="Consolas" pitchFamily="34" charset="-120"/>
+              </a:rPr>
+              <a:t>")</a:t>
             </a:r>
             <a:endParaRPr lang="en-US" sz="1300" dirty="0"/>
           </a:p>
@@ -6228,18 +6239,7 @@
                 <a:ea typeface="Consolas" pitchFamily="34" charset="-122"/>
                 <a:cs typeface="Consolas" pitchFamily="34" charset="-120"/>
               </a:rPr>
-              <a:t>    </a:t>
-            </a:r>
-            <a:r>
-              <a:rPr lang="en-US" sz="1300" i="1" dirty="0">
-                <a:solidFill>
-                  <a:srgbClr val="6E89AE"/>
-                </a:solidFill>
-                <a:latin typeface="Consolas" pitchFamily="34" charset="0"/>
-                <a:ea typeface="Consolas" pitchFamily="34" charset="-122"/>
-                <a:cs typeface="Consolas" pitchFamily="34" charset="-120"/>
-              </a:rPr>
-              <a:t># optional — only Phases 2/3/4 need these</a:t>
+              <a:t> </a:t>
             </a:r>
             <a:endParaRPr lang="en-US" sz="1300" dirty="0"/>
           </a:p>
@@ -6259,40 +6259,18 @@
                 <a:ea typeface="Consolas" pitchFamily="34" charset="-122"/>
                 <a:cs typeface="Consolas" pitchFamily="34" charset="-120"/>
               </a:rPr>
-              <a:t>    mcp_finance_server_path: Path | </a:t>
-            </a:r>
-            <a:r>
-              <a:rPr lang="en-US" sz="1300" b="1" dirty="0">
-                <a:solidFill>
-                  <a:srgbClr val="7FD1C4"/>
-                </a:solidFill>
-                <a:latin typeface="Consolas" pitchFamily="34" charset="0"/>
-                <a:ea typeface="Consolas" pitchFamily="34" charset="-122"/>
-                <a:cs typeface="Consolas" pitchFamily="34" charset="-120"/>
-              </a:rPr>
-              <a:t>None</a:t>
-            </a:r>
-            <a:r>
-              <a:rPr lang="en-US" sz="1300" dirty="0">
-                <a:solidFill>
-                  <a:srgbClr val="D6E2F0"/>
-                </a:solidFill>
-                <a:latin typeface="Consolas" pitchFamily="34" charset="0"/>
-                <a:ea typeface="Consolas" pitchFamily="34" charset="-122"/>
-                <a:cs typeface="Consolas" pitchFamily="34" charset="-120"/>
-              </a:rPr>
-              <a:t> = </a:t>
-            </a:r>
-            <a:r>
-              <a:rPr lang="en-US" sz="1300" b="1" dirty="0">
-                <a:solidFill>
-                  <a:srgbClr val="7FD1C4"/>
-                </a:solidFill>
-                <a:latin typeface="Consolas" pitchFamily="34" charset="0"/>
-                <a:ea typeface="Consolas" pitchFamily="34" charset="-122"/>
-                <a:cs typeface="Consolas" pitchFamily="34" charset="-120"/>
-              </a:rPr>
-              <a:t>None</a:t>
+              <a:t>    </a:t>
+            </a:r>
+            <a:r>
+              <a:rPr lang="en-US" sz="1300" i="1" dirty="0">
+                <a:solidFill>
+                  <a:srgbClr val="6E89AE"/>
+                </a:solidFill>
+                <a:latin typeface="Consolas" pitchFamily="34" charset="0"/>
+                <a:ea typeface="Consolas" pitchFamily="34" charset="-122"/>
+                <a:cs typeface="Consolas" pitchFamily="34" charset="-120"/>
+              </a:rPr>
+              <a:t># optional — only Phases 2/3/4 need these</a:t>
             </a:r>
             <a:endParaRPr lang="en-US" sz="1300" dirty="0"/>
           </a:p>
@@ -6312,7 +6290,7 @@
                 <a:ea typeface="Consolas" pitchFamily="34" charset="-122"/>
                 <a:cs typeface="Consolas" pitchFamily="34" charset="-120"/>
               </a:rPr>
-              <a:t>    azure_endpoint: str | </a:t>
+              <a:t>    mcp_finance_server_path: Path | </a:t>
             </a:r>
             <a:r>
               <a:rPr lang="en-US" sz="1300" b="1" dirty="0">
@@ -6365,6 +6343,59 @@
                 <a:ea typeface="Consolas" pitchFamily="34" charset="-122"/>
                 <a:cs typeface="Consolas" pitchFamily="34" charset="-120"/>
               </a:rPr>
+              <a:t>    azure_endpoint: str | </a:t>
+            </a:r>
+            <a:r>
+              <a:rPr lang="en-US" sz="1300" b="1" dirty="0">
+                <a:solidFill>
+                  <a:srgbClr val="7FD1C4"/>
+                </a:solidFill>
+                <a:latin typeface="Consolas" pitchFamily="34" charset="0"/>
+                <a:ea typeface="Consolas" pitchFamily="34" charset="-122"/>
+                <a:cs typeface="Consolas" pitchFamily="34" charset="-120"/>
+              </a:rPr>
+              <a:t>None</a:t>
+            </a:r>
+            <a:r>
+              <a:rPr lang="en-US" sz="1300" dirty="0">
+                <a:solidFill>
+                  <a:srgbClr val="D6E2F0"/>
+                </a:solidFill>
+                <a:latin typeface="Consolas" pitchFamily="34" charset="0"/>
+                <a:ea typeface="Consolas" pitchFamily="34" charset="-122"/>
+                <a:cs typeface="Consolas" pitchFamily="34" charset="-120"/>
+              </a:rPr>
+              <a:t> = </a:t>
+            </a:r>
+            <a:r>
+              <a:rPr lang="en-US" sz="1300" b="1" dirty="0">
+                <a:solidFill>
+                  <a:srgbClr val="7FD1C4"/>
+                </a:solidFill>
+                <a:latin typeface="Consolas" pitchFamily="34" charset="0"/>
+                <a:ea typeface="Consolas" pitchFamily="34" charset="-122"/>
+                <a:cs typeface="Consolas" pitchFamily="34" charset="-120"/>
+              </a:rPr>
+              <a:t>None</a:t>
+            </a:r>
+            <a:endParaRPr lang="en-US" sz="1300" dirty="0"/>
+          </a:p>
+          <a:p>
+            <a:pPr marL="0" indent="0">
+              <a:lnSpc>
+                <a:spcPct val="106000"/>
+              </a:lnSpc>
+              <a:buNone/>
+            </a:pPr>
+            <a:r>
+              <a:rPr lang="en-US" sz="1300" dirty="0">
+                <a:solidFill>
+                  <a:srgbClr val="D6E2F0"/>
+                </a:solidFill>
+                <a:latin typeface="Consolas" pitchFamily="34" charset="0"/>
+                <a:ea typeface="Consolas" pitchFamily="34" charset="-122"/>
+                <a:cs typeface="Consolas" pitchFamily="34" charset="-120"/>
+              </a:rPr>
               <a:t>    azure_api_key: str | </a:t>
             </a:r>
             <a:r>
@@ -6399,6 +6430,37 @@
                 <a:cs typeface="Consolas" pitchFamily="34" charset="-120"/>
               </a:rPr>
               <a:t>None</a:t>
+            </a:r>
+            <a:endParaRPr lang="en-US" sz="1300" dirty="0"/>
+          </a:p>
+          <a:p>
+            <a:pPr marL="0" indent="0">
+              <a:lnSpc>
+                <a:spcPct val="106000"/>
+              </a:lnSpc>
+              <a:buNone/>
+            </a:pPr>
+            <a:r>
+              <a:rPr lang="en-US" sz="1300" dirty="0">
+                <a:solidFill>
+                  <a:srgbClr val="D6E2F0"/>
+                </a:solidFill>
+                <a:latin typeface="Consolas" pitchFamily="34" charset="0"/>
+                <a:ea typeface="Consolas" pitchFamily="34" charset="-122"/>
+                <a:cs typeface="Consolas" pitchFamily="34" charset="-120"/>
+              </a:rPr>
+              <a:t>    judge_provider: str = Field("azure-openai", alias="JUDGE_PROVIDER</a:t>
+            </a:r>
+            <a:r>
+              <a:rPr lang="en-US" sz="1300" dirty="0">
+                <a:solidFill>
+                  <a:srgbClr val="E3B341"/>
+                </a:solidFill>
+                <a:latin typeface="Consolas" pitchFamily="34" charset="0"/>
+                <a:ea typeface="Consolas" pitchFamily="34" charset="-122"/>
+                <a:cs typeface="Consolas" pitchFamily="34" charset="-120"/>
+              </a:rPr>
+              <a:t>")</a:t>
             </a:r>
             <a:endParaRPr lang="en-US" sz="1300" dirty="0"/>
           </a:p>
@@ -7628,7 +7690,7 @@
                 <a:ea typeface="Calibri" pitchFamily="34" charset="-122"/>
                 <a:cs typeface="Calibri" pitchFamily="34" charset="-120"/>
               </a:rPr>
-              <a:t> is a one-line change — the eval harness, PyRIT target and MCP wiring are all unaffected. This is the strongest “no vendor lock-in” message in the talk.</a:t>
+              <a:t> is a one-line change — the eval harness, PyRIT target and MCP wiring are all unaffected. This is the strongest “no vendor lock-in” message in the talk. In the app it isn’t even a code change: set MODEL_PROVIDER — foundry · openai · azure-openai · anthropic — or pass --provider on the CLI.</a:t>
             </a:r>
             <a:endParaRPr lang="en-US" sz="1500" dirty="0"/>
           </a:p>
@@ -8380,7 +8442,7 @@
                 <a:ea typeface="Consolas" pitchFamily="34" charset="-122"/>
                 <a:cs typeface="Consolas" pitchFamily="34" charset="-120"/>
               </a:rPr>
-              <a:t> build_chat_agent(settings, *, instructions=DEFAULT_INSTRUCTIONS, tools=</a:t>
+              <a:t> build_chat_agent(settings, *, provider=None, instructions=DEFAULT_INSTRUCTIONS, tools=</a:t>
             </a:r>
             <a:r>
               <a:rPr lang="en-US" sz="1300" b="1" dirty="0">
@@ -8422,7 +8484,7 @@
                 <a:ea typeface="Consolas" pitchFamily="34" charset="-122"/>
                 <a:cs typeface="Consolas" pitchFamily="34" charset="-120"/>
               </a:rPr>
-              <a:t>    client = build_foundry_client(settings)</a:t>
+              <a:t>    client = build_chat_client(settings, provider=provider)</a:t>
             </a:r>
             <a:endParaRPr lang="en-US" sz="1300" dirty="0"/>
           </a:p>
@@ -9475,6 +9537,86 @@
             </a:r>
             <a:endParaRPr lang="en-US" sz="1250" dirty="0"/>
           </a:p>
+          <a:p>
+            <a:pPr marL="0" indent="0">
+              <a:lnSpc>
+                <a:spcPct val="108000"/>
+              </a:lnSpc>
+              <a:buNone/>
+            </a:pPr>
+            <a:r>
+              <a:rPr lang="en-US" sz="1250" dirty="0">
+                <a:solidFill>
+                  <a:srgbClr val="7FD1C4"/>
+                </a:solidFill>
+                <a:latin typeface="Consolas" pitchFamily="34" charset="0"/>
+                <a:ea typeface="Consolas" pitchFamily="34" charset="-122"/>
+                <a:cs typeface="Consolas" pitchFamily="34" charset="-120"/>
+              </a:rPr>
+              <a:t> </a:t>
+            </a:r>
+            <a:endParaRPr lang="en-US" sz="1250" dirty="0"/>
+          </a:p>
+          <a:p>
+            <a:pPr marL="0" indent="0">
+              <a:lnSpc>
+                <a:spcPct val="108000"/>
+              </a:lnSpc>
+              <a:buNone/>
+            </a:pPr>
+            <a:r>
+              <a:rPr lang="en-US" sz="1250" dirty="0">
+                <a:solidFill>
+                  <a:srgbClr val="8FA6C4"/>
+                </a:solidFill>
+                <a:latin typeface="Consolas" pitchFamily="34" charset="0"/>
+                <a:ea typeface="Consolas" pitchFamily="34" charset="-122"/>
+                <a:cs typeface="Consolas" pitchFamily="34" charset="-120"/>
+              </a:rPr>
+              <a:t># same agent, different model provider:</a:t>
+            </a:r>
+            <a:endParaRPr lang="en-US" sz="1250" dirty="0"/>
+          </a:p>
+          <a:p>
+            <a:pPr marL="0" indent="0">
+              <a:lnSpc>
+                <a:spcPct val="108000"/>
+              </a:lnSpc>
+              <a:buNone/>
+            </a:pPr>
+            <a:r>
+              <a:rPr lang="en-US" sz="1250" dirty="0">
+                <a:solidFill>
+                  <a:srgbClr val="7FD1C4"/>
+                </a:solidFill>
+                <a:latin typeface="Consolas" pitchFamily="34" charset="0"/>
+                <a:ea typeface="Consolas" pitchFamily="34" charset="-122"/>
+                <a:cs typeface="Consolas" pitchFamily="34" charset="-120"/>
+              </a:rPr>
+              <a:t>$ uv run ms-agent-app --provider openai</a:t>
+            </a:r>
+            <a:endParaRPr lang="en-US" sz="1250" dirty="0"/>
+          </a:p>
+          <a:p>
+            <a:pPr marL="0" indent="0">
+              <a:lnSpc>
+                <a:spcPct val="108000"/>
+              </a:lnSpc>
+              <a:buNone/>
+            </a:pPr>
+            <a:r>
+              <a:rPr lang="en-US" sz="1250" dirty="0">
+                <a:solidFill>
+                  <a:srgbClr val="7FD1C4"/>
+                </a:solidFill>
+                <a:latin typeface="Consolas" pitchFamily="34" charset="0"/>
+                <a:ea typeface="Consolas" pitchFamily="34" charset="-122"/>
+                <a:cs typeface="Consolas" pitchFamily="34" charset="-120"/>
+              </a:rPr>
+              <a:t>$ uv run ms-agent-app --provider anthropic</a:t>
+            </a:r>
+            <a:endParaRPr lang="en-US" sz="1250" dirty="0"/>
+          </a:p>
         </p:txBody>
       </p:sp>
       <p:sp>
@@ -16041,7 +16183,7 @@
                 <a:ea typeface="Calibri" pitchFamily="34" charset="-122"/>
                 <a:cs typeface="Calibri" pitchFamily="34" charset="-120"/>
               </a:rPr>
-              <a:t> deployment via AzureOpenAIModelConfiguration — so the judge isn't grading its own output. Following Anthropic's guidance, each dimension is an </a:t>
+              <a:t> deployment via AzureOpenAIModelConfiguration or OpenAIModelConfiguration (chosen by JUDGE_PROVIDER) — so the judge isn't grading its own output. Following Anthropic's guidance, each dimension is an </a:t>
             </a:r>
             <a:r>
               <a:rPr lang="en-US" sz="1450" b="1" dirty="0">
@@ -23704,7 +23846,7 @@
                           <a:ea typeface="Calibri" pitchFamily="34" charset="-122"/>
                           <a:cs typeface="Calibri" pitchFamily="34" charset="-120"/>
                         </a:rPr>
-                        <a:t>same gpt-4.1-mini deployment as Phase 3</a:t>
+                        <a:t>same judge as Phase 3 · routed by JUDGE_PROVIDER</a:t>
                       </a:r>
                       <a:endParaRPr lang="en-US" sz="1250" dirty="0">
                         <a:latin typeface="Calibri" charset="0"/>
@@ -36234,7 +36376,7 @@
                 <a:ea typeface="Calibri" pitchFamily="34" charset="-122"/>
                 <a:cs typeface="Calibri" pitchFamily="34" charset="-120"/>
               </a:rPr>
-              <a:t>Eval and PyRIT attach to the same Agent and route their judge calls to the same Azure OpenAI deployment.</a:t>
+              <a:t>Eval and PyRIT attach to the same Agent and route their judge calls through one configurable judge — Azure OpenAI by default, OpenAI via JUDGE_PROVIDER.</a:t>
             </a:r>
             <a:endParaRPr lang="en-US" sz="1350" dirty="0"/>
           </a:p>
